--- a/docs/Advanced Biological Control Systems - Figures.pptx
+++ b/docs/Advanced Biological Control Systems - Figures.pptx
@@ -5,9 +5,8 @@
     <p:sldMasterId id="2147483648" r:id="rId1"/>
   </p:sldMasterIdLst>
   <p:sldIdLst>
-    <p:sldId id="256" r:id="rId2"/>
-    <p:sldId id="257" r:id="rId3"/>
-    <p:sldId id="258" r:id="rId4"/>
+    <p:sldId id="257" r:id="rId2"/>
+    <p:sldId id="258" r:id="rId3"/>
   </p:sldIdLst>
   <p:sldSz cx="12192000" cy="6858000"/>
   <p:notesSz cx="6858000" cy="9144000"/>
@@ -261,7 +260,7 @@
           <a:p>
             <a:fld id="{7C2E31FC-62A1-354D-9EAE-1878143CD131}" type="datetimeFigureOut">
               <a:rPr lang="en-US" smtClean="0"/>
-              <a:t>10/30/23</a:t>
+              <a:t>11/24/25</a:t>
             </a:fld>
             <a:endParaRPr lang="en-US"/>
           </a:p>
@@ -459,7 +458,7 @@
           <a:p>
             <a:fld id="{7C2E31FC-62A1-354D-9EAE-1878143CD131}" type="datetimeFigureOut">
               <a:rPr lang="en-US" smtClean="0"/>
-              <a:t>10/30/23</a:t>
+              <a:t>11/24/25</a:t>
             </a:fld>
             <a:endParaRPr lang="en-US"/>
           </a:p>
@@ -667,7 +666,7 @@
           <a:p>
             <a:fld id="{7C2E31FC-62A1-354D-9EAE-1878143CD131}" type="datetimeFigureOut">
               <a:rPr lang="en-US" smtClean="0"/>
-              <a:t>10/30/23</a:t>
+              <a:t>11/24/25</a:t>
             </a:fld>
             <a:endParaRPr lang="en-US"/>
           </a:p>
@@ -865,7 +864,7 @@
           <a:p>
             <a:fld id="{7C2E31FC-62A1-354D-9EAE-1878143CD131}" type="datetimeFigureOut">
               <a:rPr lang="en-US" smtClean="0"/>
-              <a:t>10/30/23</a:t>
+              <a:t>11/24/25</a:t>
             </a:fld>
             <a:endParaRPr lang="en-US"/>
           </a:p>
@@ -1140,7 +1139,7 @@
           <a:p>
             <a:fld id="{7C2E31FC-62A1-354D-9EAE-1878143CD131}" type="datetimeFigureOut">
               <a:rPr lang="en-US" smtClean="0"/>
-              <a:t>10/30/23</a:t>
+              <a:t>11/24/25</a:t>
             </a:fld>
             <a:endParaRPr lang="en-US"/>
           </a:p>
@@ -1405,7 +1404,7 @@
           <a:p>
             <a:fld id="{7C2E31FC-62A1-354D-9EAE-1878143CD131}" type="datetimeFigureOut">
               <a:rPr lang="en-US" smtClean="0"/>
-              <a:t>10/30/23</a:t>
+              <a:t>11/24/25</a:t>
             </a:fld>
             <a:endParaRPr lang="en-US"/>
           </a:p>
@@ -1817,7 +1816,7 @@
           <a:p>
             <a:fld id="{7C2E31FC-62A1-354D-9EAE-1878143CD131}" type="datetimeFigureOut">
               <a:rPr lang="en-US" smtClean="0"/>
-              <a:t>10/30/23</a:t>
+              <a:t>11/24/25</a:t>
             </a:fld>
             <a:endParaRPr lang="en-US"/>
           </a:p>
@@ -1958,7 +1957,7 @@
           <a:p>
             <a:fld id="{7C2E31FC-62A1-354D-9EAE-1878143CD131}" type="datetimeFigureOut">
               <a:rPr lang="en-US" smtClean="0"/>
-              <a:t>10/30/23</a:t>
+              <a:t>11/24/25</a:t>
             </a:fld>
             <a:endParaRPr lang="en-US"/>
           </a:p>
@@ -2071,7 +2070,7 @@
           <a:p>
             <a:fld id="{7C2E31FC-62A1-354D-9EAE-1878143CD131}" type="datetimeFigureOut">
               <a:rPr lang="en-US" smtClean="0"/>
-              <a:t>10/30/23</a:t>
+              <a:t>11/24/25</a:t>
             </a:fld>
             <a:endParaRPr lang="en-US"/>
           </a:p>
@@ -2382,7 +2381,7 @@
           <a:p>
             <a:fld id="{7C2E31FC-62A1-354D-9EAE-1878143CD131}" type="datetimeFigureOut">
               <a:rPr lang="en-US" smtClean="0"/>
-              <a:t>10/30/23</a:t>
+              <a:t>11/24/25</a:t>
             </a:fld>
             <a:endParaRPr lang="en-US"/>
           </a:p>
@@ -2670,7 +2669,7 @@
           <a:p>
             <a:fld id="{7C2E31FC-62A1-354D-9EAE-1878143CD131}" type="datetimeFigureOut">
               <a:rPr lang="en-US" smtClean="0"/>
-              <a:t>10/30/23</a:t>
+              <a:t>11/24/25</a:t>
             </a:fld>
             <a:endParaRPr lang="en-US"/>
           </a:p>
@@ -2911,7 +2910,7 @@
           <a:p>
             <a:fld id="{7C2E31FC-62A1-354D-9EAE-1878143CD131}" type="datetimeFigureOut">
               <a:rPr lang="en-US" smtClean="0"/>
-              <a:t>10/30/23</a:t>
+              <a:t>11/24/25</a:t>
             </a:fld>
             <a:endParaRPr lang="en-US"/>
           </a:p>
@@ -3330,136 +3329,6 @@
       </p:grpSpPr>
       <p:sp>
         <p:nvSpPr>
-          <p:cNvPr id="2" name="Title 1">
-            <a:extLst>
-              <a:ext uri="{FF2B5EF4-FFF2-40B4-BE49-F238E27FC236}">
-                <a16:creationId xmlns:a16="http://schemas.microsoft.com/office/drawing/2014/main" id="{2BB8ADD7-F47D-CE47-BBAE-BEA0DFB36B04}"/>
-              </a:ext>
-            </a:extLst>
-          </p:cNvPr>
-          <p:cNvSpPr>
-            <a:spLocks noGrp="1"/>
-          </p:cNvSpPr>
-          <p:nvPr>
-            <p:ph type="ctrTitle"/>
-          </p:nvPr>
-        </p:nvSpPr>
-        <p:spPr/>
-        <p:txBody>
-          <a:bodyPr/>
-          <a:lstStyle/>
-          <a:p>
-            <a:r>
-              <a:rPr lang="en-US" dirty="0"/>
-              <a:t>Advanced Biological Control System</a:t>
-            </a:r>
-          </a:p>
-        </p:txBody>
-      </p:sp>
-      <p:sp>
-        <p:nvSpPr>
-          <p:cNvPr id="3" name="Subtitle 2">
-            <a:extLst>
-              <a:ext uri="{FF2B5EF4-FFF2-40B4-BE49-F238E27FC236}">
-                <a16:creationId xmlns:a16="http://schemas.microsoft.com/office/drawing/2014/main" id="{512CAA4F-9EEB-7543-B2BA-76A2B48B4AAC}"/>
-              </a:ext>
-            </a:extLst>
-          </p:cNvPr>
-          <p:cNvSpPr>
-            <a:spLocks noGrp="1"/>
-          </p:cNvSpPr>
-          <p:nvPr>
-            <p:ph type="subTitle" idx="1"/>
-          </p:nvPr>
-        </p:nvSpPr>
-        <p:spPr/>
-        <p:txBody>
-          <a:bodyPr/>
-          <a:lstStyle/>
-          <a:p>
-            <a:endParaRPr lang="en-US"/>
-          </a:p>
-        </p:txBody>
-      </p:sp>
-    </p:spTree>
-    <p:extLst>
-      <p:ext uri="{BB962C8B-B14F-4D97-AF65-F5344CB8AC3E}">
-        <p14:creationId xmlns:p14="http://schemas.microsoft.com/office/powerpoint/2010/main" val="317359280"/>
-      </p:ext>
-    </p:extLst>
-  </p:cSld>
-  <p:clrMapOvr>
-    <a:masterClrMapping/>
-  </p:clrMapOvr>
-</p:sld>
-</file>
-
-<file path=ppt/slides/slide2.xml><?xml version="1.0" encoding="utf-8"?>
-<p:sld xmlns:a="http://schemas.openxmlformats.org/drawingml/2006/main" xmlns:r="http://schemas.openxmlformats.org/officeDocument/2006/relationships" xmlns:p="http://schemas.openxmlformats.org/presentationml/2006/main">
-  <p:cSld>
-    <p:spTree>
-      <p:nvGrpSpPr>
-        <p:cNvPr id="1" name=""/>
-        <p:cNvGrpSpPr/>
-        <p:nvPr/>
-      </p:nvGrpSpPr>
-      <p:grpSpPr>
-        <a:xfrm>
-          <a:off x="0" y="0"/>
-          <a:ext cx="0" cy="0"/>
-          <a:chOff x="0" y="0"/>
-          <a:chExt cx="0" cy="0"/>
-        </a:xfrm>
-      </p:grpSpPr>
-      <p:pic>
-        <p:nvPicPr>
-          <p:cNvPr id="21" name="Picture 14" descr="Paul G Allen School Of Computer Science Logo, HD Png Download , Transparent  Png Image - PNGitem">
-            <a:extLst>
-              <a:ext uri="{FF2B5EF4-FFF2-40B4-BE49-F238E27FC236}">
-                <a16:creationId xmlns:a16="http://schemas.microsoft.com/office/drawing/2014/main" id="{0530E922-5CA3-DC4C-AEEF-E9EFBE4F2C73}"/>
-              </a:ext>
-            </a:extLst>
-          </p:cNvPr>
-          <p:cNvPicPr>
-            <a:picLocks noChangeAspect="1" noChangeArrowheads="1"/>
-          </p:cNvPicPr>
-          <p:nvPr/>
-        </p:nvPicPr>
-        <p:blipFill>
-          <a:blip r:embed="rId2">
-            <a:extLst>
-              <a:ext uri="{28A0092B-C50C-407E-A947-70E740481C1C}">
-                <a14:useLocalDpi xmlns:a14="http://schemas.microsoft.com/office/drawing/2010/main" val="0"/>
-              </a:ext>
-            </a:extLst>
-          </a:blip>
-          <a:srcRect/>
-          <a:stretch>
-            <a:fillRect/>
-          </a:stretch>
-        </p:blipFill>
-        <p:spPr bwMode="auto">
-          <a:xfrm>
-            <a:off x="7717265" y="6066753"/>
-            <a:ext cx="2329877" cy="699807"/>
-          </a:xfrm>
-          <a:prstGeom prst="rect">
-            <a:avLst/>
-          </a:prstGeom>
-          <a:noFill/>
-          <a:extLst>
-            <a:ext uri="{909E8E84-426E-40DD-AFC4-6F175D3DCCD1}">
-              <a14:hiddenFill xmlns:a14="http://schemas.microsoft.com/office/drawing/2010/main">
-                <a:solidFill>
-                  <a:srgbClr val="FFFFFF"/>
-                </a:solidFill>
-              </a14:hiddenFill>
-            </a:ext>
-          </a:extLst>
-        </p:spPr>
-      </p:pic>
-      <p:sp>
-        <p:nvSpPr>
           <p:cNvPr id="13" name="Rectangle 12">
             <a:extLst>
               <a:ext uri="{FF2B5EF4-FFF2-40B4-BE49-F238E27FC236}">
@@ -3527,7 +3396,7 @@
           <p:nvPr/>
         </p:nvPicPr>
         <p:blipFill>
-          <a:blip r:embed="rId3">
+          <a:blip r:embed="rId2">
             <a:extLst>
               <a:ext uri="{28A0092B-C50C-407E-A947-70E740481C1C}">
                 <a14:useLocalDpi xmlns:a14="http://schemas.microsoft.com/office/drawing/2010/main" val="0"/>
@@ -3574,7 +3443,7 @@
           <p:nvPr/>
         </p:nvPicPr>
         <p:blipFill>
-          <a:blip r:embed="rId4">
+          <a:blip r:embed="rId3">
             <a:extLst>
               <a:ext uri="{28A0092B-C50C-407E-A947-70E740481C1C}">
                 <a14:useLocalDpi xmlns:a14="http://schemas.microsoft.com/office/drawing/2010/main" val="0"/>
@@ -3738,7 +3607,7 @@
         <p:spPr>
           <a:xfrm>
             <a:off x="1677167" y="22185"/>
-            <a:ext cx="6966138" cy="461665"/>
+            <a:ext cx="7400231" cy="461665"/>
           </a:xfrm>
           <a:prstGeom prst="rect">
             <a:avLst/>
@@ -3753,7 +3622,7 @@
           <a:p>
             <a:r>
               <a:rPr lang="en-US" sz="2400" b="1" dirty="0"/>
-              <a:t>BIOEN 498/599: Advanced Biological Control Systems</a:t>
+              <a:t>BIOEN 438/538: Biomedical Control Systems Engineering</a:t>
             </a:r>
           </a:p>
         </p:txBody>
@@ -3825,7 +3694,7 @@
         <p:spPr>
           <a:xfrm>
             <a:off x="1832362" y="3834437"/>
-            <a:ext cx="8447435" cy="2031325"/>
+            <a:ext cx="8447435" cy="1815882"/>
           </a:xfrm>
           <a:prstGeom prst="rect">
             <a:avLst/>
@@ -3850,7 +3719,7 @@
             </a:pPr>
             <a:r>
               <a:rPr lang="en-US" sz="1400" dirty="0"/>
-              <a:t>learn common controller and control system designs;</a:t>
+              <a:t>build PID controllers for in silico biological systems;</a:t>
             </a:r>
           </a:p>
           <a:p>
@@ -3860,7 +3729,7 @@
             </a:pPr>
             <a:r>
               <a:rPr lang="en-US" sz="1400" dirty="0"/>
-              <a:t>analyze the controllability of biochemical networks, the extent to which there are inputs such as temperature or pH that control outputs such as metabolite concentrations;</a:t>
+              <a:t>design PID controllers using root locus analysis;</a:t>
             </a:r>
           </a:p>
           <a:p>
@@ -3870,7 +3739,7 @@
             </a:pPr>
             <a:r>
               <a:rPr lang="en-US" sz="1400" dirty="0"/>
-              <a:t>apply linear system theory to predict behaviors such as stability, settling times, and overshoot; and</a:t>
+              <a:t>&lt;add objective&gt;</a:t>
             </a:r>
           </a:p>
           <a:p>
@@ -3880,13 +3749,13 @@
             </a:pPr>
             <a:r>
               <a:rPr lang="en-US" sz="1400" dirty="0"/>
-              <a:t>develop skills with control system design.</a:t>
+              <a:t>&lt;add objective&gt;</a:t>
             </a:r>
           </a:p>
           <a:p>
             <a:r>
               <a:rPr lang="en-US" sz="1400" dirty="0"/>
-              <a:t>Ideally students have taken BIOEN 336 (Bioengineering systems &amp; control) or equivalent.</a:t>
+              <a:t>Prerequisites: BIOEN 336 (Bioengineering systems &amp; control) or equivalent.</a:t>
             </a:r>
           </a:p>
         </p:txBody>
@@ -3906,7 +3775,7 @@
           <p:nvPr/>
         </p:nvPicPr>
         <p:blipFill>
-          <a:blip r:embed="rId5">
+          <a:blip r:embed="rId4">
             <a:extLst>
               <a:ext uri="{28A0092B-C50C-407E-A947-70E740481C1C}">
                 <a14:useLocalDpi xmlns:a14="http://schemas.microsoft.com/office/drawing/2010/main" val="0"/>
@@ -3920,7 +3789,7 @@
         </p:blipFill>
         <p:spPr bwMode="auto">
           <a:xfrm>
-            <a:off x="4282355" y="6199398"/>
+            <a:off x="7961837" y="6147071"/>
             <a:ext cx="2614723" cy="420975"/>
           </a:xfrm>
           <a:prstGeom prst="rect">
@@ -3953,7 +3822,7 @@
           <p:nvPr/>
         </p:nvPicPr>
         <p:blipFill>
-          <a:blip r:embed="rId6">
+          <a:blip r:embed="rId5">
             <a:extLst>
               <a:ext uri="{28A0092B-C50C-407E-A947-70E740481C1C}">
                 <a14:useLocalDpi xmlns:a14="http://schemas.microsoft.com/office/drawing/2010/main" val="0"/>
@@ -4000,7 +3869,7 @@
           <p:nvPr/>
         </p:nvPicPr>
         <p:blipFill>
-          <a:blip r:embed="rId7">
+          <a:blip r:embed="rId6">
             <a:extLst>
               <a:ext uri="{28A0092B-C50C-407E-A947-70E740481C1C}">
                 <a14:useLocalDpi xmlns:a14="http://schemas.microsoft.com/office/drawing/2010/main" val="0"/>
@@ -4066,13 +3935,13 @@
                 </a:solidFill>
                 <a:latin typeface="Arial" panose="020B0604020202020204" pitchFamily="34" charset="0"/>
               </a:rPr>
-              <a:t>Winter, 2024. MW 1:00 – 2:20.</a:t>
+              <a:t>Winter, 2026. MW 1:00 – 2:20.</a:t>
             </a:r>
           </a:p>
           <a:p>
             <a:r>
               <a:rPr lang="en-US" sz="1200" dirty="0"/>
-              <a:t>Instructor: Joseph L. Hellerstein, Senior Fellow (eScience Institute), Affiliate Professor (Allen School of Computer Science) </a:t>
+              <a:t>Instructors: Joseph L. Hellerstein (eScience Institute, Bioengineering); Herbert S Sauro (Bioengineering, eScience Institute)</a:t>
             </a:r>
           </a:p>
           <a:p>
@@ -4099,7 +3968,7 @@
           <p:nvPr/>
         </p:nvPicPr>
         <p:blipFill>
-          <a:blip r:embed="rId8">
+          <a:blip r:embed="rId7">
             <a:extLst>
               <a:ext uri="{28A0092B-C50C-407E-A947-70E740481C1C}">
                 <a14:useLocalDpi xmlns:a14="http://schemas.microsoft.com/office/drawing/2010/main" val="0"/>
@@ -4144,7 +4013,7 @@
 </p:sld>
 </file>
 
-<file path=ppt/slides/slide3.xml><?xml version="1.0" encoding="utf-8"?>
+<file path=ppt/slides/slide2.xml><?xml version="1.0" encoding="utf-8"?>
 <p:sld xmlns:a="http://schemas.openxmlformats.org/drawingml/2006/main" xmlns:r="http://schemas.openxmlformats.org/officeDocument/2006/relationships" xmlns:p="http://schemas.openxmlformats.org/presentationml/2006/main">
   <p:cSld>
     <p:spTree>
